--- a/public/fun/cards/expert/expert-11.pptx
+++ b/public/fun/cards/expert/expert-11.pptx
@@ -3085,7 +3085,7 @@
     <p:bg>
       <p:bgPr>
         <a:solidFill>
-          <a:srgbClr val="F3F5F7"/>
+          <a:srgbClr val="FFFFFF"/>
         </a:solidFill>
         <a:effectLst/>
       </p:bgPr>
@@ -3099,20 +3099,41 @@
       <p:grpSpPr/>
       <p:sp>
         <p:nvSpPr>
-          <p:cNvPr id="2" name="Rectangle 1"/>
+          <p:cNvPr id="2" name="Freeform 1"/>
           <p:cNvSpPr/>
           <p:nvPr/>
         </p:nvSpPr>
         <p:spPr>
           <a:xfrm>
-            <a:off x="0" y="0"/>
-            <a:ext cx="165600" cy="1800000"/>
+            <a:off x="2016000" y="0"/>
+            <a:ext cx="1224000" cy="1800000"/>
           </a:xfrm>
-          <a:prstGeom prst="rect">
+          <a:custGeom>
             <a:avLst/>
-          </a:prstGeom>
+            <a:gdLst/>
+            <a:ahLst/>
+            <a:cxnLst/>
+            <a:rect l="l" t="t" r="r" b="b"/>
+            <a:pathLst>
+              <a:path w="1224000" h="1800000">
+                <a:moveTo>
+                  <a:pt x="360000" y="0"/>
+                </a:moveTo>
+                <a:lnTo>
+                  <a:pt x="1224000" y="0"/>
+                </a:lnTo>
+                <a:lnTo>
+                  <a:pt x="1224000" y="1800000"/>
+                </a:lnTo>
+                <a:lnTo>
+                  <a:pt x="0" y="1800000"/>
+                </a:lnTo>
+                <a:close/>
+              </a:path>
+            </a:pathLst>
+          </a:custGeom>
           <a:solidFill>
-            <a:srgbClr val="5A7887"/>
+            <a:srgbClr val="FF9E6B"/>
           </a:solidFill>
           <a:ln>
             <a:noFill/>
@@ -3128,20 +3149,41 @@
       </p:sp>
       <p:sp>
         <p:nvSpPr>
-          <p:cNvPr id="3" name="Rectangle 2"/>
+          <p:cNvPr id="3" name="Freeform 2"/>
           <p:cNvSpPr/>
           <p:nvPr/>
         </p:nvSpPr>
         <p:spPr>
           <a:xfrm>
-            <a:off x="165600" y="0"/>
-            <a:ext cx="36000" cy="1800000"/>
+            <a:off x="1864800" y="0"/>
+            <a:ext cx="460800" cy="1800000"/>
           </a:xfrm>
-          <a:prstGeom prst="rect">
+          <a:custGeom>
             <a:avLst/>
-          </a:prstGeom>
+            <a:gdLst/>
+            <a:ahLst/>
+            <a:cxnLst/>
+            <a:rect l="l" t="t" r="r" b="b"/>
+            <a:pathLst>
+              <a:path w="460800" h="1800000">
+                <a:moveTo>
+                  <a:pt x="360000" y="0"/>
+                </a:moveTo>
+                <a:lnTo>
+                  <a:pt x="460800" y="0"/>
+                </a:lnTo>
+                <a:lnTo>
+                  <a:pt x="100800" y="1800000"/>
+                </a:lnTo>
+                <a:lnTo>
+                  <a:pt x="0" y="1800000"/>
+                </a:lnTo>
+                <a:close/>
+              </a:path>
+            </a:pathLst>
+          </a:custGeom>
           <a:solidFill>
-            <a:srgbClr val="E4EBEF"/>
+            <a:srgbClr val="FFF1EA"/>
           </a:solidFill>
           <a:ln>
             <a:noFill/>
@@ -3157,128 +3199,14 @@
       </p:sp>
       <p:sp>
         <p:nvSpPr>
-          <p:cNvPr id="4" name="Rounded Rectangle 3"/>
-          <p:cNvSpPr/>
+          <p:cNvPr id="4" name="텍스트"/>
+          <p:cNvSpPr txBox="1"/>
           <p:nvPr/>
         </p:nvSpPr>
         <p:spPr>
           <a:xfrm>
-            <a:off x="2683584" y="398736"/>
-            <a:ext cx="69120" cy="124416"/>
-          </a:xfrm>
-          <a:prstGeom prst="roundRect">
-            <a:avLst>
-              <a:gd name="adj" fmla="val 10000"/>
-            </a:avLst>
-          </a:prstGeom>
-          <a:solidFill>
-            <a:srgbClr val="5A7887"/>
-          </a:solidFill>
-          <a:ln>
-            <a:noFill/>
-          </a:ln>
-        </p:spPr>
-        <p:txBody>
-          <a:bodyPr rtlCol="0" anchor="ctr"/>
-          <a:lstStyle/>
-          <a:p>
-            <a:pPr algn="ctr"/>
-          </a:p>
-        </p:txBody>
-      </p:sp>
-      <p:sp>
-        <p:nvSpPr>
-          <p:cNvPr id="5" name="Rounded Rectangle 4"/>
-          <p:cNvSpPr/>
-          <p:nvPr/>
-        </p:nvSpPr>
-        <p:spPr>
-          <a:xfrm>
-            <a:off x="2773440" y="329616"/>
-            <a:ext cx="69120" cy="193536"/>
-          </a:xfrm>
-          <a:prstGeom prst="roundRect">
-            <a:avLst>
-              <a:gd name="adj" fmla="val 10000"/>
-            </a:avLst>
-          </a:prstGeom>
-          <a:solidFill>
-            <a:srgbClr val="E4EBEF"/>
-          </a:solidFill>
-          <a:ln>
-            <a:noFill/>
-          </a:ln>
-        </p:spPr>
-        <p:txBody>
-          <a:bodyPr rtlCol="0" anchor="ctr"/>
-          <a:lstStyle/>
-          <a:p>
-            <a:pPr algn="ctr"/>
-          </a:p>
-        </p:txBody>
-      </p:sp>
-      <p:sp>
-        <p:nvSpPr>
-          <p:cNvPr id="6" name="Rounded Rectangle 5"/>
-          <p:cNvSpPr/>
-          <p:nvPr/>
-        </p:nvSpPr>
-        <p:spPr>
-          <a:xfrm>
-            <a:off x="2863296" y="246672"/>
-            <a:ext cx="69120" cy="276480"/>
-          </a:xfrm>
-          <a:prstGeom prst="roundRect">
-            <a:avLst>
-              <a:gd name="adj" fmla="val 10000"/>
-            </a:avLst>
-          </a:prstGeom>
-          <a:solidFill>
-            <a:srgbClr val="5A7887"/>
-          </a:solidFill>
-          <a:ln>
-            <a:noFill/>
-          </a:ln>
-        </p:spPr>
-        <p:txBody>
-          <a:bodyPr rtlCol="0" anchor="ctr"/>
-          <a:lstStyle/>
-          <a:p>
-            <a:pPr algn="ctr"/>
-          </a:p>
-        </p:txBody>
-      </p:sp>
-      <p:cxnSp>
-        <p:nvCxnSpPr>
-          <p:cNvPr id="7" name="Connector 6"/>
-          <p:cNvCxnSpPr/>
-          <p:nvPr/>
-        </p:nvCxnSpPr>
-        <p:spPr>
-          <a:xfrm>
-            <a:off x="2655936" y="536976"/>
-            <a:ext cx="304128" cy="0"/>
-          </a:xfrm>
-          <a:prstGeom prst="line">
-            <a:avLst/>
-          </a:prstGeom>
-          <a:ln w="13824">
-            <a:solidFill>
-              <a:srgbClr val="E4EBEF"/>
-            </a:solidFill>
-          </a:ln>
-        </p:spPr>
-      </p:cxnSp>
-      <p:sp>
-        <p:nvSpPr>
-          <p:cNvPr id="8" name="텍스트"/>
-          <p:cNvSpPr txBox="1"/>
-          <p:nvPr/>
-        </p:nvSpPr>
-        <p:spPr>
-          <a:xfrm>
-            <a:off x="396000" y="223200"/>
-            <a:ext cx="2016000" cy="108000"/>
+            <a:off x="252000" y="223200"/>
+            <a:ext cx="1440000" cy="133351"/>
           </a:xfrm>
           <a:prstGeom prst="rect">
             <a:avLst/>
@@ -3293,13 +3221,13 @@
           <a:p>
             <a:pPr algn="l">
               <a:lnSpc>
-                <a:spcPts val="1087"/>
+                <a:spcPts val="1015"/>
               </a:lnSpc>
             </a:pPr>
             <a:r>
-              <a:rPr sz="750" b="1" spc="150">
+              <a:rPr sz="700" b="1" spc="200">
                 <a:solidFill>
-                  <a:srgbClr val="636D72"/>
+                  <a:srgbClr val="6B7280"/>
                 </a:solidFill>
                 <a:latin typeface="맑은 고딕"/>
                 <a:ea typeface="맑은 고딕"/>
@@ -3311,14 +3239,14 @@
       </p:sp>
       <p:sp>
         <p:nvSpPr>
-          <p:cNvPr id="9" name="텍스트"/>
+          <p:cNvPr id="5" name="텍스트"/>
           <p:cNvSpPr txBox="1"/>
           <p:nvPr/>
         </p:nvSpPr>
         <p:spPr>
           <a:xfrm>
-            <a:off x="396000" y="540000"/>
-            <a:ext cx="2160000" cy="313692"/>
+            <a:off x="252000" y="540000"/>
+            <a:ext cx="1584000" cy="360000"/>
           </a:xfrm>
           <a:prstGeom prst="rect">
             <a:avLst/>
@@ -3333,13 +3261,13 @@
           <a:p>
             <a:pPr algn="l">
               <a:lnSpc>
-                <a:spcPts val="2755"/>
+                <a:spcPts val="3190"/>
               </a:lnSpc>
             </a:pPr>
             <a:r>
-              <a:rPr sz="1900" b="1" spc="50">
+              <a:rPr sz="2200" b="1">
                 <a:solidFill>
-                  <a:srgbClr val="314149"/>
+                  <a:srgbClr val="12151C"/>
                 </a:solidFill>
                 <a:latin typeface="맑은 고딕"/>
                 <a:ea typeface="맑은 고딕"/>
@@ -3351,14 +3279,14 @@
       </p:sp>
       <p:sp>
         <p:nvSpPr>
-          <p:cNvPr id="10" name="텍스트"/>
+          <p:cNvPr id="6" name="텍스트"/>
           <p:cNvSpPr txBox="1"/>
           <p:nvPr/>
         </p:nvSpPr>
         <p:spPr>
           <a:xfrm>
-            <a:off x="396000" y="835200"/>
-            <a:ext cx="2160000" cy="129600"/>
+            <a:off x="252000" y="943200"/>
+            <a:ext cx="1584000" cy="171451"/>
           </a:xfrm>
           <a:prstGeom prst="rect">
             <a:avLst/>
@@ -3373,13 +3301,13 @@
           <a:p>
             <a:pPr algn="l">
               <a:lnSpc>
-                <a:spcPts val="1232"/>
+                <a:spcPts val="1305"/>
               </a:lnSpc>
             </a:pPr>
             <a:r>
-              <a:rPr sz="850" b="1">
+              <a:rPr sz="900" b="0">
                 <a:solidFill>
-                  <a:srgbClr val="567280"/>
+                  <a:srgbClr val="6B7280"/>
                 </a:solidFill>
                 <a:latin typeface="맑은 고딕"/>
                 <a:ea typeface="맑은 고딕"/>
@@ -3391,20 +3319,20 @@
       </p:sp>
       <p:sp>
         <p:nvSpPr>
-          <p:cNvPr id="11" name="Rectangle 10"/>
+          <p:cNvPr id="7" name="Rectangle 6"/>
           <p:cNvSpPr/>
           <p:nvPr/>
         </p:nvSpPr>
         <p:spPr>
           <a:xfrm>
-            <a:off x="396000" y="1051200"/>
-            <a:ext cx="230400" cy="14400"/>
+            <a:off x="252000" y="1195200"/>
+            <a:ext cx="144000" cy="18000"/>
           </a:xfrm>
           <a:prstGeom prst="rect">
             <a:avLst/>
           </a:prstGeom>
           <a:solidFill>
-            <a:srgbClr val="5A7887"/>
+            <a:srgbClr val="FF9E6B"/>
           </a:solidFill>
           <a:ln>
             <a:noFill/>
@@ -3420,14 +3348,14 @@
       </p:sp>
       <p:sp>
         <p:nvSpPr>
-          <p:cNvPr id="12" name="텍스트"/>
+          <p:cNvPr id="8" name="텍스트"/>
           <p:cNvSpPr txBox="1"/>
           <p:nvPr/>
         </p:nvSpPr>
         <p:spPr>
           <a:xfrm>
-            <a:off x="396000" y="1188000"/>
-            <a:ext cx="122400" cy="168911"/>
+            <a:off x="252000" y="1328400"/>
+            <a:ext cx="331200" cy="99061"/>
           </a:xfrm>
           <a:prstGeom prst="rect">
             <a:avLst/>
@@ -3442,32 +3370,32 @@
           <a:p>
             <a:pPr algn="l">
               <a:lnSpc>
-                <a:spcPts val="1015"/>
+                <a:spcPts val="754"/>
               </a:lnSpc>
             </a:pPr>
             <a:r>
-              <a:rPr sz="700" b="1">
+              <a:rPr sz="520" b="1" spc="120">
                 <a:solidFill>
-                  <a:srgbClr val="567280"/>
+                  <a:srgbClr val="6B7280"/>
                 </a:solidFill>
                 <a:latin typeface="맑은 고딕"/>
                 <a:ea typeface="맑은 고딕"/>
               </a:rPr>
-              <a:t>T</a:t>
-            </a:r>
-          </a:p>
-        </p:txBody>
-      </p:sp>
-      <p:sp>
-        <p:nvSpPr>
-          <p:cNvPr id="13" name="텍스트"/>
+              <a:t>TEL</a:t>
+            </a:r>
+          </a:p>
+        </p:txBody>
+      </p:sp>
+      <p:sp>
+        <p:nvSpPr>
+          <p:cNvPr id="9" name="텍스트"/>
           <p:cNvSpPr txBox="1"/>
           <p:nvPr/>
         </p:nvSpPr>
         <p:spPr>
           <a:xfrm>
-            <a:off x="540000" y="1188000"/>
-            <a:ext cx="1872000" cy="168911"/>
+            <a:off x="583200" y="1317600"/>
+            <a:ext cx="1188000" cy="125731"/>
           </a:xfrm>
           <a:prstGeom prst="rect">
             <a:avLst/>
@@ -3482,13 +3410,13 @@
           <a:p>
             <a:pPr algn="l">
               <a:lnSpc>
-                <a:spcPts val="1015"/>
+                <a:spcPts val="956"/>
               </a:lnSpc>
             </a:pPr>
             <a:r>
-              <a:rPr sz="700" b="0">
+              <a:rPr sz="660" b="0">
                 <a:solidFill>
-                  <a:srgbClr val="314149"/>
+                  <a:srgbClr val="12151C"/>
                 </a:solidFill>
                 <a:latin typeface="맑은 고딕"/>
                 <a:ea typeface="맑은 고딕"/>
@@ -3500,14 +3428,14 @@
       </p:sp>
       <p:sp>
         <p:nvSpPr>
-          <p:cNvPr id="14" name="텍스트"/>
+          <p:cNvPr id="10" name="텍스트"/>
           <p:cNvSpPr txBox="1"/>
           <p:nvPr/>
         </p:nvSpPr>
         <p:spPr>
           <a:xfrm>
-            <a:off x="396000" y="1356911"/>
-            <a:ext cx="122400" cy="168911"/>
+            <a:off x="252000" y="1458000"/>
+            <a:ext cx="331200" cy="99061"/>
           </a:xfrm>
           <a:prstGeom prst="rect">
             <a:avLst/>
@@ -3522,32 +3450,32 @@
           <a:p>
             <a:pPr algn="l">
               <a:lnSpc>
-                <a:spcPts val="1015"/>
+                <a:spcPts val="754"/>
               </a:lnSpc>
             </a:pPr>
             <a:r>
-              <a:rPr sz="700" b="1">
+              <a:rPr sz="520" b="1" spc="120">
                 <a:solidFill>
-                  <a:srgbClr val="567280"/>
+                  <a:srgbClr val="6B7280"/>
                 </a:solidFill>
                 <a:latin typeface="맑은 고딕"/>
                 <a:ea typeface="맑은 고딕"/>
               </a:rPr>
-              <a:t>E</a:t>
-            </a:r>
-          </a:p>
-        </p:txBody>
-      </p:sp>
-      <p:sp>
-        <p:nvSpPr>
-          <p:cNvPr id="15" name="텍스트"/>
+              <a:t>MAIL</a:t>
+            </a:r>
+          </a:p>
+        </p:txBody>
+      </p:sp>
+      <p:sp>
+        <p:nvSpPr>
+          <p:cNvPr id="11" name="텍스트"/>
           <p:cNvSpPr txBox="1"/>
           <p:nvPr/>
         </p:nvSpPr>
         <p:spPr>
           <a:xfrm>
-            <a:off x="540000" y="1356911"/>
-            <a:ext cx="1872000" cy="168911"/>
+            <a:off x="583200" y="1447200"/>
+            <a:ext cx="1188000" cy="125731"/>
           </a:xfrm>
           <a:prstGeom prst="rect">
             <a:avLst/>
@@ -3562,13 +3490,13 @@
           <a:p>
             <a:pPr algn="l">
               <a:lnSpc>
-                <a:spcPts val="1015"/>
+                <a:spcPts val="956"/>
               </a:lnSpc>
             </a:pPr>
             <a:r>
-              <a:rPr sz="700" b="0">
+              <a:rPr sz="660" b="0">
                 <a:solidFill>
-                  <a:srgbClr val="314149"/>
+                  <a:srgbClr val="12151C"/>
                 </a:solidFill>
                 <a:latin typeface="맑은 고딕"/>
                 <a:ea typeface="맑은 고딕"/>
@@ -3580,14 +3508,14 @@
       </p:sp>
       <p:sp>
         <p:nvSpPr>
-          <p:cNvPr id="16" name="텍스트"/>
+          <p:cNvPr id="12" name="텍스트"/>
           <p:cNvSpPr txBox="1"/>
           <p:nvPr/>
         </p:nvSpPr>
         <p:spPr>
           <a:xfrm>
-            <a:off x="396000" y="1525822"/>
-            <a:ext cx="122400" cy="168911"/>
+            <a:off x="252000" y="1587600"/>
+            <a:ext cx="331200" cy="99061"/>
           </a:xfrm>
           <a:prstGeom prst="rect">
             <a:avLst/>
@@ -3602,32 +3530,32 @@
           <a:p>
             <a:pPr algn="l">
               <a:lnSpc>
-                <a:spcPts val="1015"/>
+                <a:spcPts val="754"/>
               </a:lnSpc>
             </a:pPr>
             <a:r>
-              <a:rPr sz="700" b="1">
+              <a:rPr sz="520" b="1" spc="120">
                 <a:solidFill>
-                  <a:srgbClr val="567280"/>
+                  <a:srgbClr val="6B7280"/>
                 </a:solidFill>
                 <a:latin typeface="맑은 고딕"/>
                 <a:ea typeface="맑은 고딕"/>
               </a:rPr>
-              <a:t>A</a:t>
-            </a:r>
-          </a:p>
-        </p:txBody>
-      </p:sp>
-      <p:sp>
-        <p:nvSpPr>
-          <p:cNvPr id="17" name="텍스트"/>
+              <a:t>ADDR</a:t>
+            </a:r>
+          </a:p>
+        </p:txBody>
+      </p:sp>
+      <p:sp>
+        <p:nvSpPr>
+          <p:cNvPr id="13" name="텍스트"/>
           <p:cNvSpPr txBox="1"/>
           <p:nvPr/>
         </p:nvSpPr>
         <p:spPr>
           <a:xfrm>
-            <a:off x="540000" y="1525822"/>
-            <a:ext cx="1872000" cy="168911"/>
+            <a:off x="583200" y="1576800"/>
+            <a:ext cx="1188000" cy="125731"/>
           </a:xfrm>
           <a:prstGeom prst="rect">
             <a:avLst/>
@@ -3642,13 +3570,13 @@
           <a:p>
             <a:pPr algn="l">
               <a:lnSpc>
-                <a:spcPts val="1015"/>
+                <a:spcPts val="956"/>
               </a:lnSpc>
             </a:pPr>
             <a:r>
-              <a:rPr sz="700" b="0">
+              <a:rPr sz="660" b="0">
                 <a:solidFill>
-                  <a:srgbClr val="314149"/>
+                  <a:srgbClr val="12151C"/>
                 </a:solidFill>
                 <a:latin typeface="맑은 고딕"/>
                 <a:ea typeface="맑은 고딕"/>
@@ -3672,7 +3600,7 @@
     <p:bg>
       <p:bgPr>
         <a:solidFill>
-          <a:srgbClr val="FFFFFF"/>
+          <a:srgbClr val="F3F4F6"/>
         </a:solidFill>
         <a:effectLst/>
       </p:bgPr>
@@ -3686,139 +3614,24 @@
       <p:grpSpPr/>
       <p:sp>
         <p:nvSpPr>
-          <p:cNvPr id="2" name="Rounded Rectangle 1"/>
+          <p:cNvPr id="2" name="Rectangle 1"/>
           <p:cNvSpPr/>
           <p:nvPr/>
         </p:nvSpPr>
         <p:spPr>
           <a:xfrm>
-            <a:off x="1049760" y="995040"/>
-            <a:ext cx="316800" cy="570240"/>
-          </a:xfrm>
-          <a:prstGeom prst="roundRect">
-            <a:avLst>
-              <a:gd name="adj" fmla="val 10000"/>
-            </a:avLst>
-          </a:prstGeom>
-          <a:solidFill>
-            <a:srgbClr val="5A7887"/>
-          </a:solidFill>
-          <a:ln>
-            <a:noFill/>
-          </a:ln>
-        </p:spPr>
-        <p:txBody>
-          <a:bodyPr rtlCol="0" anchor="ctr"/>
-          <a:lstStyle/>
-          <a:p>
-            <a:pPr algn="ctr"/>
-          </a:p>
-        </p:txBody>
-      </p:sp>
-      <p:sp>
-        <p:nvSpPr>
-          <p:cNvPr id="3" name="Rounded Rectangle 2"/>
-          <p:cNvSpPr/>
-          <p:nvPr/>
-        </p:nvSpPr>
-        <p:spPr>
-          <a:xfrm>
-            <a:off x="1461600" y="678240"/>
-            <a:ext cx="316800" cy="887040"/>
-          </a:xfrm>
-          <a:prstGeom prst="roundRect">
-            <a:avLst>
-              <a:gd name="adj" fmla="val 10000"/>
-            </a:avLst>
-          </a:prstGeom>
-          <a:solidFill>
-            <a:srgbClr val="D9E3E8"/>
-          </a:solidFill>
-          <a:ln>
-            <a:noFill/>
-          </a:ln>
-        </p:spPr>
-        <p:txBody>
-          <a:bodyPr rtlCol="0" anchor="ctr"/>
-          <a:lstStyle/>
-          <a:p>
-            <a:pPr algn="ctr"/>
-          </a:p>
-        </p:txBody>
-      </p:sp>
-      <p:sp>
-        <p:nvSpPr>
-          <p:cNvPr id="4" name="Rounded Rectangle 3"/>
-          <p:cNvSpPr/>
-          <p:nvPr/>
-        </p:nvSpPr>
-        <p:spPr>
-          <a:xfrm>
-            <a:off x="1873440" y="298080"/>
-            <a:ext cx="316800" cy="1267200"/>
-          </a:xfrm>
-          <a:prstGeom prst="roundRect">
-            <a:avLst>
-              <a:gd name="adj" fmla="val 10000"/>
-            </a:avLst>
-          </a:prstGeom>
-          <a:solidFill>
-            <a:srgbClr val="5A7887"/>
-          </a:solidFill>
-          <a:ln>
-            <a:noFill/>
-          </a:ln>
-        </p:spPr>
-        <p:txBody>
-          <a:bodyPr rtlCol="0" anchor="ctr"/>
-          <a:lstStyle/>
-          <a:p>
-            <a:pPr algn="ctr"/>
-          </a:p>
-        </p:txBody>
-      </p:sp>
-      <p:cxnSp>
-        <p:nvCxnSpPr>
-          <p:cNvPr id="5" name="Connector 4"/>
-          <p:cNvCxnSpPr/>
-          <p:nvPr/>
-        </p:nvCxnSpPr>
-        <p:spPr>
-          <a:xfrm>
-            <a:off x="923040" y="1628640"/>
-            <a:ext cx="1393920" cy="0"/>
-          </a:xfrm>
-          <a:prstGeom prst="line">
-            <a:avLst/>
-          </a:prstGeom>
-          <a:ln w="63360">
-            <a:solidFill>
-              <a:srgbClr val="D9E3E8"/>
-            </a:solidFill>
-          </a:ln>
-        </p:spPr>
-      </p:cxnSp>
-      <p:sp>
-        <p:nvSpPr>
-          <p:cNvPr id="6" name="Rectangle 5"/>
-          <p:cNvSpPr/>
-          <p:nvPr/>
-        </p:nvSpPr>
-        <p:spPr>
-          <a:xfrm>
-            <a:off x="0" y="0"/>
-            <a:ext cx="3240000" cy="1800000"/>
+            <a:off x="2304000" y="504000"/>
+            <a:ext cx="684000" cy="684000"/>
           </a:xfrm>
           <a:prstGeom prst="rect">
             <a:avLst/>
           </a:prstGeom>
-          <a:solidFill>
-            <a:srgbClr val="FFFFFF">
-              <a:alpha val="90000"/>
-            </a:srgbClr>
-          </a:solidFill>
-          <a:ln>
-            <a:noFill/>
+          <a:noFill/>
+          <a:ln w="7200">
+            <a:solidFill>
+              <a:srgbClr val="6B7280"/>
+            </a:solidFill>
+            <a:prstDash val="dash"/>
           </a:ln>
         </p:spPr>
         <p:txBody>
@@ -3831,14 +3644,14 @@
       </p:sp>
       <p:sp>
         <p:nvSpPr>
-          <p:cNvPr id="7" name="텍스트"/>
+          <p:cNvPr id="3" name="텍스트"/>
           <p:cNvSpPr txBox="1"/>
           <p:nvPr/>
         </p:nvSpPr>
         <p:spPr>
           <a:xfrm>
-            <a:off x="396000" y="612000"/>
-            <a:ext cx="2448000" cy="432000"/>
+            <a:off x="2304000" y="504000"/>
+            <a:ext cx="684000" cy="684000"/>
           </a:xfrm>
           <a:prstGeom prst="rect">
             <a:avLst/>
@@ -3853,61 +3666,32 @@
           <a:p>
             <a:pPr algn="ctr">
               <a:lnSpc>
-                <a:spcPts val="1739"/>
+                <a:spcPts val="1595"/>
               </a:lnSpc>
             </a:pPr>
             <a:r>
-              <a:rPr sz="1200" b="1">
+              <a:rPr sz="1100" b="1">
                 <a:solidFill>
-                  <a:srgbClr val="314149"/>
+                  <a:srgbClr val="6B7280"/>
                 </a:solidFill>
-                <a:latin typeface="바탕"/>
-                <a:ea typeface="바탕"/>
+                <a:latin typeface="맑은 고딕"/>
+                <a:ea typeface="맑은 고딕"/>
               </a:rPr>
-              <a:t>혼자여도 팀처럼 일합니다</a:t>
-            </a:r>
-          </a:p>
-        </p:txBody>
-      </p:sp>
-      <p:sp>
-        <p:nvSpPr>
-          <p:cNvPr id="8" name="Rectangle 7"/>
-          <p:cNvSpPr/>
+              <a:t>QR</a:t>
+            </a:r>
+          </a:p>
+        </p:txBody>
+      </p:sp>
+      <p:sp>
+        <p:nvSpPr>
+          <p:cNvPr id="4" name="텍스트"/>
+          <p:cNvSpPr txBox="1"/>
           <p:nvPr/>
         </p:nvSpPr>
         <p:spPr>
           <a:xfrm>
-            <a:off x="1512000" y="1173600"/>
-            <a:ext cx="216000" cy="10800"/>
-          </a:xfrm>
-          <a:prstGeom prst="rect">
-            <a:avLst/>
-          </a:prstGeom>
-          <a:solidFill>
-            <a:srgbClr val="5A7887"/>
-          </a:solidFill>
-          <a:ln>
-            <a:noFill/>
-          </a:ln>
-        </p:spPr>
-        <p:txBody>
-          <a:bodyPr rtlCol="0" anchor="ctr"/>
-          <a:lstStyle/>
-          <a:p>
-            <a:pPr algn="ctr"/>
-          </a:p>
-        </p:txBody>
-      </p:sp>
-      <p:sp>
-        <p:nvSpPr>
-          <p:cNvPr id="9" name="텍스트"/>
-          <p:cNvSpPr txBox="1"/>
-          <p:nvPr/>
-        </p:nvSpPr>
-        <p:spPr>
-          <a:xfrm>
-            <a:off x="360000" y="1288800"/>
-            <a:ext cx="2520000" cy="108000"/>
+            <a:off x="252000" y="504000"/>
+            <a:ext cx="1728000" cy="720000"/>
           </a:xfrm>
           <a:prstGeom prst="rect">
             <a:avLst/>
@@ -3920,15 +3704,101 @@
           </a:bodyPr>
           <a:lstStyle/>
           <a:p>
-            <a:pPr algn="ctr">
+            <a:pPr algn="l">
               <a:lnSpc>
-                <a:spcPts val="1087"/>
+                <a:spcPts val="1739"/>
               </a:lnSpc>
             </a:pPr>
             <a:r>
-              <a:rPr sz="750" b="1" spc="300">
+              <a:rPr sz="1200" b="1">
                 <a:solidFill>
-                  <a:srgbClr val="6D777B"/>
+                  <a:srgbClr val="12151C"/>
+                </a:solidFill>
+                <a:latin typeface="맑은 고딕"/>
+                <a:ea typeface="맑은 고딕"/>
+              </a:rPr>
+              <a:t>혼자여도 팀처럼</a:t>
+            </a:r>
+          </a:p>
+          <a:p>
+            <a:pPr algn="l">
+              <a:lnSpc>
+                <a:spcPts val="1739"/>
+              </a:lnSpc>
+            </a:pPr>
+            <a:r>
+              <a:rPr sz="1200" b="1">
+                <a:solidFill>
+                  <a:srgbClr val="12151C"/>
+                </a:solidFill>
+                <a:latin typeface="맑은 고딕"/>
+                <a:ea typeface="맑은 고딕"/>
+              </a:rPr>
+              <a:t>일합니다</a:t>
+            </a:r>
+          </a:p>
+        </p:txBody>
+      </p:sp>
+      <p:sp>
+        <p:nvSpPr>
+          <p:cNvPr id="5" name="Rectangle 4"/>
+          <p:cNvSpPr/>
+          <p:nvPr/>
+        </p:nvSpPr>
+        <p:spPr>
+          <a:xfrm>
+            <a:off x="252000" y="1296000"/>
+            <a:ext cx="144000" cy="18000"/>
+          </a:xfrm>
+          <a:prstGeom prst="rect">
+            <a:avLst/>
+          </a:prstGeom>
+          <a:solidFill>
+            <a:srgbClr val="FF9E6B"/>
+          </a:solidFill>
+          <a:ln>
+            <a:noFill/>
+          </a:ln>
+        </p:spPr>
+        <p:txBody>
+          <a:bodyPr rtlCol="0" anchor="ctr"/>
+          <a:lstStyle/>
+          <a:p>
+            <a:pPr algn="ctr"/>
+          </a:p>
+        </p:txBody>
+      </p:sp>
+      <p:sp>
+        <p:nvSpPr>
+          <p:cNvPr id="6" name="텍스트"/>
+          <p:cNvSpPr txBox="1"/>
+          <p:nvPr/>
+        </p:nvSpPr>
+        <p:spPr>
+          <a:xfrm>
+            <a:off x="252000" y="1404000"/>
+            <a:ext cx="1656000" cy="133351"/>
+          </a:xfrm>
+          <a:prstGeom prst="rect">
+            <a:avLst/>
+          </a:prstGeom>
+          <a:noFill/>
+        </p:spPr>
+        <p:txBody>
+          <a:bodyPr wrap="square" lIns="0" rIns="0" tIns="0" bIns="0" anchor="t">
+            <a:spAutoFit/>
+          </a:bodyPr>
+          <a:lstStyle/>
+          <a:p>
+            <a:pPr algn="l">
+              <a:lnSpc>
+                <a:spcPts val="1015"/>
+              </a:lnSpc>
+            </a:pPr>
+            <a:r>
+              <a:rPr sz="700" b="1" spc="200">
+                <a:solidFill>
+                  <a:srgbClr val="6B7280"/>
                 </a:solidFill>
                 <a:latin typeface="맑은 고딕"/>
                 <a:ea typeface="맑은 고딕"/>

--- a/public/fun/cards/expert/expert-11.pptx
+++ b/public/fun/cards/expert/expert-11.pptx
@@ -3105,8 +3105,8 @@
         </p:nvSpPr>
         <p:spPr>
           <a:xfrm>
-            <a:off x="2016000" y="0"/>
-            <a:ext cx="1224000" cy="1800000"/>
+            <a:off x="2124000" y="0"/>
+            <a:ext cx="1116000" cy="1800000"/>
           </a:xfrm>
           <a:custGeom>
             <a:avLst/>
@@ -3115,15 +3115,15 @@
             <a:cxnLst/>
             <a:rect l="l" t="t" r="r" b="b"/>
             <a:pathLst>
-              <a:path w="1224000" h="1800000">
+              <a:path w="1116000" h="1800000">
                 <a:moveTo>
                   <a:pt x="360000" y="0"/>
                 </a:moveTo>
                 <a:lnTo>
-                  <a:pt x="1224000" y="0"/>
+                  <a:pt x="1116000" y="0"/>
                 </a:lnTo>
                 <a:lnTo>
-                  <a:pt x="1224000" y="1800000"/>
+                  <a:pt x="1116000" y="1800000"/>
                 </a:lnTo>
                 <a:lnTo>
                   <a:pt x="0" y="1800000"/>
@@ -3147,66 +3147,79 @@
           </a:p>
         </p:txBody>
       </p:sp>
-      <p:sp>
-        <p:nvSpPr>
-          <p:cNvPr id="3" name="Freeform 2"/>
-          <p:cNvSpPr/>
+      <p:cxnSp>
+        <p:nvCxnSpPr>
+          <p:cNvPr id="3" name="Connector 2"/>
+          <p:cNvCxnSpPr/>
           <p:nvPr/>
-        </p:nvSpPr>
-        <p:spPr>
-          <a:xfrm>
-            <a:off x="1864800" y="0"/>
-            <a:ext cx="460800" cy="1800000"/>
-          </a:xfrm>
-          <a:custGeom>
+        </p:nvCxnSpPr>
+        <p:spPr>
+          <a:xfrm flipH="1">
+            <a:off x="2044800" y="0"/>
+            <a:ext cx="360000" cy="1800000"/>
+          </a:xfrm>
+          <a:prstGeom prst="line">
             <a:avLst/>
-            <a:gdLst/>
-            <a:ahLst/>
-            <a:cxnLst/>
-            <a:rect l="l" t="t" r="r" b="b"/>
-            <a:pathLst>
-              <a:path w="460800" h="1800000">
-                <a:moveTo>
-                  <a:pt x="360000" y="0"/>
-                </a:moveTo>
-                <a:lnTo>
-                  <a:pt x="460800" y="0"/>
-                </a:lnTo>
-                <a:lnTo>
-                  <a:pt x="100800" y="1800000"/>
-                </a:lnTo>
-                <a:lnTo>
-                  <a:pt x="0" y="1800000"/>
-                </a:lnTo>
-                <a:close/>
-              </a:path>
-            </a:pathLst>
-          </a:custGeom>
-          <a:solidFill>
-            <a:srgbClr val="FFF1EA"/>
-          </a:solidFill>
-          <a:ln>
-            <a:noFill/>
+          </a:prstGeom>
+          <a:ln w="3600">
+            <a:solidFill>
+              <a:srgbClr val="FFF1EA"/>
+            </a:solidFill>
           </a:ln>
         </p:spPr>
-        <p:txBody>
-          <a:bodyPr rtlCol="0" anchor="ctr"/>
-          <a:lstStyle/>
-          <a:p>
-            <a:pPr algn="ctr"/>
-          </a:p>
-        </p:txBody>
-      </p:sp>
-      <p:sp>
-        <p:nvSpPr>
-          <p:cNvPr id="4" name="텍스트"/>
+      </p:cxnSp>
+      <p:cxnSp>
+        <p:nvCxnSpPr>
+          <p:cNvPr id="4" name="Connector 3"/>
+          <p:cNvCxnSpPr/>
+          <p:nvPr/>
+        </p:nvCxnSpPr>
+        <p:spPr>
+          <a:xfrm flipH="1">
+            <a:off x="1965600" y="0"/>
+            <a:ext cx="360000" cy="1800000"/>
+          </a:xfrm>
+          <a:prstGeom prst="line">
+            <a:avLst/>
+          </a:prstGeom>
+          <a:ln w="3600">
+            <a:solidFill>
+              <a:srgbClr val="FFF1EA"/>
+            </a:solidFill>
+          </a:ln>
+        </p:spPr>
+      </p:cxnSp>
+      <p:cxnSp>
+        <p:nvCxnSpPr>
+          <p:cNvPr id="5" name="Connector 4"/>
+          <p:cNvCxnSpPr/>
+          <p:nvPr/>
+        </p:nvCxnSpPr>
+        <p:spPr>
+          <a:xfrm flipH="1">
+            <a:off x="1886400" y="0"/>
+            <a:ext cx="360000" cy="1800000"/>
+          </a:xfrm>
+          <a:prstGeom prst="line">
+            <a:avLst/>
+          </a:prstGeom>
+          <a:ln w="3600">
+            <a:solidFill>
+              <a:srgbClr val="FFF1EA"/>
+            </a:solidFill>
+          </a:ln>
+        </p:spPr>
+      </p:cxnSp>
+      <p:sp>
+        <p:nvSpPr>
+          <p:cNvPr id="6" name="텍스트"/>
           <p:cNvSpPr txBox="1"/>
           <p:nvPr/>
         </p:nvSpPr>
         <p:spPr>
           <a:xfrm>
-            <a:off x="252000" y="223200"/>
-            <a:ext cx="1440000" cy="133351"/>
+            <a:off x="252000" y="252000"/>
+            <a:ext cx="1440000" cy="123826"/>
           </a:xfrm>
           <a:prstGeom prst="rect">
             <a:avLst/>
@@ -3221,11 +3234,11 @@
           <a:p>
             <a:pPr algn="l">
               <a:lnSpc>
-                <a:spcPts val="1015"/>
+                <a:spcPts val="942"/>
               </a:lnSpc>
             </a:pPr>
             <a:r>
-              <a:rPr sz="700" b="1" spc="200">
+              <a:rPr sz="650" b="1" spc="220">
                 <a:solidFill>
                   <a:srgbClr val="6B7280"/>
                 </a:solidFill>
@@ -3237,16 +3250,37 @@
           </a:p>
         </p:txBody>
       </p:sp>
-      <p:sp>
-        <p:nvSpPr>
-          <p:cNvPr id="5" name="텍스트"/>
+      <p:cxnSp>
+        <p:nvCxnSpPr>
+          <p:cNvPr id="7" name="Connector 6"/>
+          <p:cNvCxnSpPr/>
+          <p:nvPr/>
+        </p:nvCxnSpPr>
+        <p:spPr>
+          <a:xfrm>
+            <a:off x="252000" y="374400"/>
+            <a:ext cx="1260000" cy="0"/>
+          </a:xfrm>
+          <a:prstGeom prst="line">
+            <a:avLst/>
+          </a:prstGeom>
+          <a:ln w="3600">
+            <a:solidFill>
+              <a:srgbClr val="E3E5E9"/>
+            </a:solidFill>
+          </a:ln>
+        </p:spPr>
+      </p:cxnSp>
+      <p:sp>
+        <p:nvSpPr>
+          <p:cNvPr id="8" name="텍스트"/>
           <p:cNvSpPr txBox="1"/>
           <p:nvPr/>
         </p:nvSpPr>
         <p:spPr>
           <a:xfrm>
-            <a:off x="252000" y="540000"/>
-            <a:ext cx="1584000" cy="360000"/>
+            <a:off x="252000" y="633600"/>
+            <a:ext cx="1800000" cy="237600"/>
           </a:xfrm>
           <a:prstGeom prst="rect">
             <a:avLst/>
@@ -3261,11 +3295,11 @@
           <a:p>
             <a:pPr algn="l">
               <a:lnSpc>
-                <a:spcPts val="3190"/>
+                <a:spcPts val="1957"/>
               </a:lnSpc>
             </a:pPr>
             <a:r>
-              <a:rPr sz="2200" b="1">
+              <a:rPr sz="1350" b="1" spc="120">
                 <a:solidFill>
                   <a:srgbClr val="12151C"/>
                 </a:solidFill>
@@ -3279,14 +3313,14 @@
       </p:sp>
       <p:sp>
         <p:nvSpPr>
-          <p:cNvPr id="6" name="텍스트"/>
+          <p:cNvPr id="9" name="텍스트"/>
           <p:cNvSpPr txBox="1"/>
           <p:nvPr/>
         </p:nvSpPr>
         <p:spPr>
           <a:xfrm>
-            <a:off x="252000" y="943200"/>
-            <a:ext cx="1584000" cy="171451"/>
+            <a:off x="252000" y="885600"/>
+            <a:ext cx="1800000" cy="133351"/>
           </a:xfrm>
           <a:prstGeom prst="rect">
             <a:avLst/>
@@ -3301,11 +3335,11 @@
           <a:p>
             <a:pPr algn="l">
               <a:lnSpc>
-                <a:spcPts val="1305"/>
+                <a:spcPts val="1015"/>
               </a:lnSpc>
             </a:pPr>
             <a:r>
-              <a:rPr sz="900" b="0">
+              <a:rPr sz="700" b="0" spc="60">
                 <a:solidFill>
                   <a:srgbClr val="6B7280"/>
                 </a:solidFill>
@@ -3319,14 +3353,14 @@
       </p:sp>
       <p:sp>
         <p:nvSpPr>
-          <p:cNvPr id="7" name="Rectangle 6"/>
+          <p:cNvPr id="10" name="Rectangle 9"/>
           <p:cNvSpPr/>
           <p:nvPr/>
         </p:nvSpPr>
         <p:spPr>
           <a:xfrm>
-            <a:off x="252000" y="1195200"/>
-            <a:ext cx="144000" cy="18000"/>
+            <a:off x="252000" y="1044000"/>
+            <a:ext cx="129600" cy="14400"/>
           </a:xfrm>
           <a:prstGeom prst="rect">
             <a:avLst/>
@@ -3348,14 +3382,14 @@
       </p:sp>
       <p:sp>
         <p:nvSpPr>
-          <p:cNvPr id="8" name="텍스트"/>
+          <p:cNvPr id="11" name="텍스트"/>
           <p:cNvSpPr txBox="1"/>
           <p:nvPr/>
         </p:nvSpPr>
         <p:spPr>
           <a:xfrm>
-            <a:off x="252000" y="1328400"/>
-            <a:ext cx="331200" cy="99061"/>
+            <a:off x="252000" y="1184400"/>
+            <a:ext cx="324000" cy="91441"/>
           </a:xfrm>
           <a:prstGeom prst="rect">
             <a:avLst/>
@@ -3370,11 +3404,11 @@
           <a:p>
             <a:pPr algn="l">
               <a:lnSpc>
-                <a:spcPts val="754"/>
+                <a:spcPts val="696"/>
               </a:lnSpc>
             </a:pPr>
             <a:r>
-              <a:rPr sz="520" b="1" spc="120">
+              <a:rPr sz="480" b="1" spc="140">
                 <a:solidFill>
                   <a:srgbClr val="6B7280"/>
                 </a:solidFill>
@@ -3388,14 +3422,14 @@
       </p:sp>
       <p:sp>
         <p:nvSpPr>
-          <p:cNvPr id="9" name="텍스트"/>
+          <p:cNvPr id="12" name="텍스트"/>
           <p:cNvSpPr txBox="1"/>
           <p:nvPr/>
         </p:nvSpPr>
         <p:spPr>
           <a:xfrm>
-            <a:off x="583200" y="1317600"/>
-            <a:ext cx="1188000" cy="125731"/>
+            <a:off x="576000" y="1173600"/>
+            <a:ext cx="972000" cy="120016"/>
           </a:xfrm>
           <a:prstGeom prst="rect">
             <a:avLst/>
@@ -3410,11 +3444,11 @@
           <a:p>
             <a:pPr algn="l">
               <a:lnSpc>
-                <a:spcPts val="956"/>
+                <a:spcPts val="913"/>
               </a:lnSpc>
             </a:pPr>
             <a:r>
-              <a:rPr sz="660" b="0">
+              <a:rPr sz="630" b="0">
                 <a:solidFill>
                   <a:srgbClr val="12151C"/>
                 </a:solidFill>
@@ -3428,14 +3462,14 @@
       </p:sp>
       <p:sp>
         <p:nvSpPr>
-          <p:cNvPr id="10" name="텍스트"/>
+          <p:cNvPr id="13" name="텍스트"/>
           <p:cNvSpPr txBox="1"/>
           <p:nvPr/>
         </p:nvSpPr>
         <p:spPr>
           <a:xfrm>
-            <a:off x="252000" y="1458000"/>
-            <a:ext cx="331200" cy="99061"/>
+            <a:off x="252000" y="1314000"/>
+            <a:ext cx="324000" cy="91441"/>
           </a:xfrm>
           <a:prstGeom prst="rect">
             <a:avLst/>
@@ -3450,11 +3484,11 @@
           <a:p>
             <a:pPr algn="l">
               <a:lnSpc>
-                <a:spcPts val="754"/>
+                <a:spcPts val="696"/>
               </a:lnSpc>
             </a:pPr>
             <a:r>
-              <a:rPr sz="520" b="1" spc="120">
+              <a:rPr sz="480" b="1" spc="140">
                 <a:solidFill>
                   <a:srgbClr val="6B7280"/>
                 </a:solidFill>
@@ -3468,14 +3502,14 @@
       </p:sp>
       <p:sp>
         <p:nvSpPr>
-          <p:cNvPr id="11" name="텍스트"/>
+          <p:cNvPr id="14" name="텍스트"/>
           <p:cNvSpPr txBox="1"/>
           <p:nvPr/>
         </p:nvSpPr>
         <p:spPr>
           <a:xfrm>
-            <a:off x="583200" y="1447200"/>
-            <a:ext cx="1188000" cy="125731"/>
+            <a:off x="576000" y="1303200"/>
+            <a:ext cx="972000" cy="120016"/>
           </a:xfrm>
           <a:prstGeom prst="rect">
             <a:avLst/>
@@ -3490,11 +3524,11 @@
           <a:p>
             <a:pPr algn="l">
               <a:lnSpc>
-                <a:spcPts val="956"/>
+                <a:spcPts val="913"/>
               </a:lnSpc>
             </a:pPr>
             <a:r>
-              <a:rPr sz="660" b="0">
+              <a:rPr sz="630" b="0">
                 <a:solidFill>
                   <a:srgbClr val="12151C"/>
                 </a:solidFill>
@@ -3508,14 +3542,14 @@
       </p:sp>
       <p:sp>
         <p:nvSpPr>
-          <p:cNvPr id="12" name="텍스트"/>
+          <p:cNvPr id="15" name="텍스트"/>
           <p:cNvSpPr txBox="1"/>
           <p:nvPr/>
         </p:nvSpPr>
         <p:spPr>
           <a:xfrm>
-            <a:off x="252000" y="1587600"/>
-            <a:ext cx="331200" cy="99061"/>
+            <a:off x="252000" y="1443600"/>
+            <a:ext cx="324000" cy="91441"/>
           </a:xfrm>
           <a:prstGeom prst="rect">
             <a:avLst/>
@@ -3530,11 +3564,11 @@
           <a:p>
             <a:pPr algn="l">
               <a:lnSpc>
-                <a:spcPts val="754"/>
+                <a:spcPts val="696"/>
               </a:lnSpc>
             </a:pPr>
             <a:r>
-              <a:rPr sz="520" b="1" spc="120">
+              <a:rPr sz="480" b="1" spc="140">
                 <a:solidFill>
                   <a:srgbClr val="6B7280"/>
                 </a:solidFill>
@@ -3548,14 +3582,14 @@
       </p:sp>
       <p:sp>
         <p:nvSpPr>
-          <p:cNvPr id="13" name="텍스트"/>
+          <p:cNvPr id="16" name="텍스트"/>
           <p:cNvSpPr txBox="1"/>
           <p:nvPr/>
         </p:nvSpPr>
         <p:spPr>
           <a:xfrm>
-            <a:off x="583200" y="1576800"/>
-            <a:ext cx="1188000" cy="125731"/>
+            <a:off x="576000" y="1432800"/>
+            <a:ext cx="972000" cy="120016"/>
           </a:xfrm>
           <a:prstGeom prst="rect">
             <a:avLst/>
@@ -3570,11 +3604,11 @@
           <a:p>
             <a:pPr algn="l">
               <a:lnSpc>
-                <a:spcPts val="956"/>
+                <a:spcPts val="913"/>
               </a:lnSpc>
             </a:pPr>
             <a:r>
-              <a:rPr sz="660" b="0">
+              <a:rPr sz="630" b="0">
                 <a:solidFill>
                   <a:srgbClr val="12151C"/>
                 </a:solidFill>
@@ -3612,22 +3646,548 @@
         <p:nvPr/>
       </p:nvGrpSpPr>
       <p:grpSpPr/>
-      <p:sp>
-        <p:nvSpPr>
-          <p:cNvPr id="2" name="Rectangle 1"/>
-          <p:cNvSpPr/>
+      <p:cxnSp>
+        <p:nvCxnSpPr>
+          <p:cNvPr id="2" name="Connector 1"/>
+          <p:cNvCxnSpPr/>
           <p:nvPr/>
-        </p:nvSpPr>
-        <p:spPr>
-          <a:xfrm>
-            <a:off x="2304000" y="504000"/>
-            <a:ext cx="684000" cy="684000"/>
+        </p:nvCxnSpPr>
+        <p:spPr>
+          <a:xfrm>
+            <a:off x="396000" y="360000"/>
+            <a:ext cx="0" cy="648000"/>
+          </a:xfrm>
+          <a:prstGeom prst="line">
+            <a:avLst/>
+          </a:prstGeom>
+          <a:ln w="5760">
+            <a:solidFill>
+              <a:srgbClr val="FF9E6B"/>
+            </a:solidFill>
+          </a:ln>
+        </p:spPr>
+      </p:cxnSp>
+      <p:sp>
+        <p:nvSpPr>
+          <p:cNvPr id="3" name="텍스트"/>
+          <p:cNvSpPr txBox="1"/>
+          <p:nvPr/>
+        </p:nvSpPr>
+        <p:spPr>
+          <a:xfrm>
+            <a:off x="252000" y="187200"/>
+            <a:ext cx="1440000" cy="99061"/>
           </a:xfrm>
           <a:prstGeom prst="rect">
             <a:avLst/>
           </a:prstGeom>
           <a:noFill/>
-          <a:ln w="7200">
+        </p:spPr>
+        <p:txBody>
+          <a:bodyPr wrap="square" lIns="0" rIns="0" tIns="0" bIns="0" anchor="t">
+            <a:spAutoFit/>
+          </a:bodyPr>
+          <a:lstStyle/>
+          <a:p>
+            <a:pPr algn="l">
+              <a:lnSpc>
+                <a:spcPts val="754"/>
+              </a:lnSpc>
+            </a:pPr>
+            <a:r>
+              <a:rPr sz="520" b="1" spc="240">
+                <a:solidFill>
+                  <a:srgbClr val="6B7280"/>
+                </a:solidFill>
+                <a:latin typeface="맑은 고딕"/>
+                <a:ea typeface="맑은 고딕"/>
+              </a:rPr>
+              <a:t>전문 분야</a:t>
+            </a:r>
+          </a:p>
+        </p:txBody>
+      </p:sp>
+      <p:sp>
+        <p:nvSpPr>
+          <p:cNvPr id="4" name="Oval 3"/>
+          <p:cNvSpPr/>
+          <p:nvPr/>
+        </p:nvSpPr>
+        <p:spPr>
+          <a:xfrm>
+            <a:off x="367200" y="374400"/>
+            <a:ext cx="57600" cy="57600"/>
+          </a:xfrm>
+          <a:prstGeom prst="ellipse">
+            <a:avLst/>
+          </a:prstGeom>
+          <a:solidFill>
+            <a:srgbClr val="FF9E6B"/>
+          </a:solidFill>
+          <a:ln w="5760">
+            <a:solidFill>
+              <a:srgbClr val="FF9E6B"/>
+            </a:solidFill>
+          </a:ln>
+        </p:spPr>
+        <p:txBody>
+          <a:bodyPr rtlCol="0" anchor="ctr"/>
+          <a:lstStyle/>
+          <a:p>
+            <a:pPr algn="ctr"/>
+          </a:p>
+        </p:txBody>
+      </p:sp>
+      <p:sp>
+        <p:nvSpPr>
+          <p:cNvPr id="5" name="텍스트"/>
+          <p:cNvSpPr txBox="1"/>
+          <p:nvPr/>
+        </p:nvSpPr>
+        <p:spPr>
+          <a:xfrm>
+            <a:off x="540000" y="331200"/>
+            <a:ext cx="1512000" cy="158400"/>
+          </a:xfrm>
+          <a:prstGeom prst="rect">
+            <a:avLst/>
+          </a:prstGeom>
+          <a:noFill/>
+        </p:spPr>
+        <p:txBody>
+          <a:bodyPr wrap="square" lIns="0" rIns="0" tIns="0" bIns="0" anchor="t">
+            <a:spAutoFit/>
+          </a:bodyPr>
+          <a:lstStyle/>
+          <a:p>
+            <a:pPr algn="l">
+              <a:lnSpc>
+                <a:spcPts val="1073"/>
+              </a:lnSpc>
+            </a:pPr>
+            <a:r>
+              <a:rPr sz="740" b="1">
+                <a:solidFill>
+                  <a:srgbClr val="12151C"/>
+                </a:solidFill>
+                <a:latin typeface="맑은 고딕"/>
+                <a:ea typeface="맑은 고딕"/>
+              </a:rPr>
+              <a:t>앱 개발</a:t>
+            </a:r>
+          </a:p>
+        </p:txBody>
+      </p:sp>
+      <p:sp>
+        <p:nvSpPr>
+          <p:cNvPr id="6" name="Oval 5"/>
+          <p:cNvSpPr/>
+          <p:nvPr/>
+        </p:nvSpPr>
+        <p:spPr>
+          <a:xfrm>
+            <a:off x="367200" y="597600"/>
+            <a:ext cx="57600" cy="57600"/>
+          </a:xfrm>
+          <a:prstGeom prst="ellipse">
+            <a:avLst/>
+          </a:prstGeom>
+          <a:solidFill>
+            <a:srgbClr val="F3F4F6"/>
+          </a:solidFill>
+          <a:ln w="5760">
+            <a:solidFill>
+              <a:srgbClr val="FF9E6B"/>
+            </a:solidFill>
+          </a:ln>
+        </p:spPr>
+        <p:txBody>
+          <a:bodyPr rtlCol="0" anchor="ctr"/>
+          <a:lstStyle/>
+          <a:p>
+            <a:pPr algn="ctr"/>
+          </a:p>
+        </p:txBody>
+      </p:sp>
+      <p:sp>
+        <p:nvSpPr>
+          <p:cNvPr id="7" name="텍스트"/>
+          <p:cNvSpPr txBox="1"/>
+          <p:nvPr/>
+        </p:nvSpPr>
+        <p:spPr>
+          <a:xfrm>
+            <a:off x="540000" y="554400"/>
+            <a:ext cx="1512000" cy="158400"/>
+          </a:xfrm>
+          <a:prstGeom prst="rect">
+            <a:avLst/>
+          </a:prstGeom>
+          <a:noFill/>
+        </p:spPr>
+        <p:txBody>
+          <a:bodyPr wrap="square" lIns="0" rIns="0" tIns="0" bIns="0" anchor="t">
+            <a:spAutoFit/>
+          </a:bodyPr>
+          <a:lstStyle/>
+          <a:p>
+            <a:pPr algn="l">
+              <a:lnSpc>
+                <a:spcPts val="1073"/>
+              </a:lnSpc>
+            </a:pPr>
+            <a:r>
+              <a:rPr sz="740" b="1">
+                <a:solidFill>
+                  <a:srgbClr val="12151C"/>
+                </a:solidFill>
+                <a:latin typeface="맑은 고딕"/>
+                <a:ea typeface="맑은 고딕"/>
+              </a:rPr>
+              <a:t>번역</a:t>
+            </a:r>
+          </a:p>
+        </p:txBody>
+      </p:sp>
+      <p:sp>
+        <p:nvSpPr>
+          <p:cNvPr id="8" name="Oval 7"/>
+          <p:cNvSpPr/>
+          <p:nvPr/>
+        </p:nvSpPr>
+        <p:spPr>
+          <a:xfrm>
+            <a:off x="367200" y="820800"/>
+            <a:ext cx="57600" cy="57600"/>
+          </a:xfrm>
+          <a:prstGeom prst="ellipse">
+            <a:avLst/>
+          </a:prstGeom>
+          <a:solidFill>
+            <a:srgbClr val="F3F4F6"/>
+          </a:solidFill>
+          <a:ln w="5760">
+            <a:solidFill>
+              <a:srgbClr val="FF9E6B"/>
+            </a:solidFill>
+          </a:ln>
+        </p:spPr>
+        <p:txBody>
+          <a:bodyPr rtlCol="0" anchor="ctr"/>
+          <a:lstStyle/>
+          <a:p>
+            <a:pPr algn="ctr"/>
+          </a:p>
+        </p:txBody>
+      </p:sp>
+      <p:sp>
+        <p:nvSpPr>
+          <p:cNvPr id="9" name="텍스트"/>
+          <p:cNvSpPr txBox="1"/>
+          <p:nvPr/>
+        </p:nvSpPr>
+        <p:spPr>
+          <a:xfrm>
+            <a:off x="540000" y="777600"/>
+            <a:ext cx="1512000" cy="158400"/>
+          </a:xfrm>
+          <a:prstGeom prst="rect">
+            <a:avLst/>
+          </a:prstGeom>
+          <a:noFill/>
+        </p:spPr>
+        <p:txBody>
+          <a:bodyPr wrap="square" lIns="0" rIns="0" tIns="0" bIns="0" anchor="t">
+            <a:spAutoFit/>
+          </a:bodyPr>
+          <a:lstStyle/>
+          <a:p>
+            <a:pPr algn="l">
+              <a:lnSpc>
+                <a:spcPts val="1073"/>
+              </a:lnSpc>
+            </a:pPr>
+            <a:r>
+              <a:rPr sz="740" b="1">
+                <a:solidFill>
+                  <a:srgbClr val="12151C"/>
+                </a:solidFill>
+                <a:latin typeface="맑은 고딕"/>
+                <a:ea typeface="맑은 고딕"/>
+              </a:rPr>
+              <a:t>컨설팅</a:t>
+            </a:r>
+          </a:p>
+        </p:txBody>
+      </p:sp>
+      <p:sp>
+        <p:nvSpPr>
+          <p:cNvPr id="10" name="Oval 9"/>
+          <p:cNvSpPr/>
+          <p:nvPr/>
+        </p:nvSpPr>
+        <p:spPr>
+          <a:xfrm>
+            <a:off x="367200" y="1044000"/>
+            <a:ext cx="57600" cy="57600"/>
+          </a:xfrm>
+          <a:prstGeom prst="ellipse">
+            <a:avLst/>
+          </a:prstGeom>
+          <a:solidFill>
+            <a:srgbClr val="F3F4F6"/>
+          </a:solidFill>
+          <a:ln w="5760">
+            <a:solidFill>
+              <a:srgbClr val="FF9E6B"/>
+            </a:solidFill>
+          </a:ln>
+        </p:spPr>
+        <p:txBody>
+          <a:bodyPr rtlCol="0" anchor="ctr"/>
+          <a:lstStyle/>
+          <a:p>
+            <a:pPr algn="ctr"/>
+          </a:p>
+        </p:txBody>
+      </p:sp>
+      <p:sp>
+        <p:nvSpPr>
+          <p:cNvPr id="11" name="텍스트"/>
+          <p:cNvSpPr txBox="1"/>
+          <p:nvPr/>
+        </p:nvSpPr>
+        <p:spPr>
+          <a:xfrm>
+            <a:off x="540000" y="1000800"/>
+            <a:ext cx="1512000" cy="158400"/>
+          </a:xfrm>
+          <a:prstGeom prst="rect">
+            <a:avLst/>
+          </a:prstGeom>
+          <a:noFill/>
+        </p:spPr>
+        <p:txBody>
+          <a:bodyPr wrap="square" lIns="0" rIns="0" tIns="0" bIns="0" anchor="t">
+            <a:spAutoFit/>
+          </a:bodyPr>
+          <a:lstStyle/>
+          <a:p>
+            <a:pPr algn="l">
+              <a:lnSpc>
+                <a:spcPts val="1073"/>
+              </a:lnSpc>
+            </a:pPr>
+            <a:r>
+              <a:rPr sz="740" b="1">
+                <a:solidFill>
+                  <a:srgbClr val="12151C"/>
+                </a:solidFill>
+                <a:latin typeface="맑은 고딕"/>
+                <a:ea typeface="맑은 고딕"/>
+              </a:rPr>
+              <a:t>자문</a:t>
+            </a:r>
+          </a:p>
+        </p:txBody>
+      </p:sp>
+      <p:cxnSp>
+        <p:nvCxnSpPr>
+          <p:cNvPr id="12" name="Connector 11"/>
+          <p:cNvCxnSpPr/>
+          <p:nvPr/>
+        </p:nvCxnSpPr>
+        <p:spPr>
+          <a:xfrm>
+            <a:off x="2232000" y="345600"/>
+            <a:ext cx="0" cy="1166400"/>
+          </a:xfrm>
+          <a:prstGeom prst="line">
+            <a:avLst/>
+          </a:prstGeom>
+          <a:ln w="3600">
+            <a:solidFill>
+              <a:srgbClr val="DCDFE4"/>
+            </a:solidFill>
+          </a:ln>
+        </p:spPr>
+      </p:cxnSp>
+      <p:sp>
+        <p:nvSpPr>
+          <p:cNvPr id="13" name="텍스트"/>
+          <p:cNvSpPr txBox="1"/>
+          <p:nvPr/>
+        </p:nvSpPr>
+        <p:spPr>
+          <a:xfrm>
+            <a:off x="2376000" y="396000"/>
+            <a:ext cx="648000" cy="91441"/>
+          </a:xfrm>
+          <a:prstGeom prst="rect">
+            <a:avLst/>
+          </a:prstGeom>
+          <a:noFill/>
+        </p:spPr>
+        <p:txBody>
+          <a:bodyPr wrap="square" lIns="0" rIns="0" tIns="0" bIns="0" anchor="t">
+            <a:spAutoFit/>
+          </a:bodyPr>
+          <a:lstStyle/>
+          <a:p>
+            <a:pPr algn="l">
+              <a:lnSpc>
+                <a:spcPts val="696"/>
+              </a:lnSpc>
+            </a:pPr>
+            <a:r>
+              <a:rPr sz="480" b="1" spc="140">
+                <a:solidFill>
+                  <a:srgbClr val="6B7280"/>
+                </a:solidFill>
+                <a:latin typeface="맑은 고딕"/>
+                <a:ea typeface="맑은 고딕"/>
+              </a:rPr>
+              <a:t>HOURS</a:t>
+            </a:r>
+          </a:p>
+        </p:txBody>
+      </p:sp>
+      <p:sp>
+        <p:nvSpPr>
+          <p:cNvPr id="14" name="텍스트"/>
+          <p:cNvSpPr txBox="1"/>
+          <p:nvPr/>
+        </p:nvSpPr>
+        <p:spPr>
+          <a:xfrm>
+            <a:off x="2376000" y="511200"/>
+            <a:ext cx="720000" cy="118111"/>
+          </a:xfrm>
+          <a:prstGeom prst="rect">
+            <a:avLst/>
+          </a:prstGeom>
+          <a:noFill/>
+        </p:spPr>
+        <p:txBody>
+          <a:bodyPr wrap="square" lIns="0" rIns="0" tIns="0" bIns="0" anchor="t">
+            <a:spAutoFit/>
+          </a:bodyPr>
+          <a:lstStyle/>
+          <a:p>
+            <a:pPr algn="l">
+              <a:lnSpc>
+                <a:spcPts val="899"/>
+              </a:lnSpc>
+            </a:pPr>
+            <a:r>
+              <a:rPr sz="620" b="0">
+                <a:solidFill>
+                  <a:srgbClr val="12151C"/>
+                </a:solidFill>
+                <a:latin typeface="맑은 고딕"/>
+                <a:ea typeface="맑은 고딕"/>
+              </a:rPr>
+              <a:t>온라인 상담 가능</a:t>
+            </a:r>
+          </a:p>
+        </p:txBody>
+      </p:sp>
+      <p:sp>
+        <p:nvSpPr>
+          <p:cNvPr id="15" name="텍스트"/>
+          <p:cNvSpPr txBox="1"/>
+          <p:nvPr/>
+        </p:nvSpPr>
+        <p:spPr>
+          <a:xfrm>
+            <a:off x="2376000" y="835200"/>
+            <a:ext cx="648000" cy="91441"/>
+          </a:xfrm>
+          <a:prstGeom prst="rect">
+            <a:avLst/>
+          </a:prstGeom>
+          <a:noFill/>
+        </p:spPr>
+        <p:txBody>
+          <a:bodyPr wrap="square" lIns="0" rIns="0" tIns="0" bIns="0" anchor="t">
+            <a:spAutoFit/>
+          </a:bodyPr>
+          <a:lstStyle/>
+          <a:p>
+            <a:pPr algn="l">
+              <a:lnSpc>
+                <a:spcPts val="696"/>
+              </a:lnSpc>
+            </a:pPr>
+            <a:r>
+              <a:rPr sz="480" b="1" spc="140">
+                <a:solidFill>
+                  <a:srgbClr val="6B7280"/>
+                </a:solidFill>
+                <a:latin typeface="맑은 고딕"/>
+                <a:ea typeface="맑은 고딕"/>
+              </a:rPr>
+              <a:t>WEB</a:t>
+            </a:r>
+          </a:p>
+        </p:txBody>
+      </p:sp>
+      <p:sp>
+        <p:nvSpPr>
+          <p:cNvPr id="16" name="텍스트"/>
+          <p:cNvSpPr txBox="1"/>
+          <p:nvPr/>
+        </p:nvSpPr>
+        <p:spPr>
+          <a:xfrm>
+            <a:off x="2376000" y="950400"/>
+            <a:ext cx="684000" cy="118111"/>
+          </a:xfrm>
+          <a:prstGeom prst="rect">
+            <a:avLst/>
+          </a:prstGeom>
+          <a:noFill/>
+        </p:spPr>
+        <p:txBody>
+          <a:bodyPr wrap="square" lIns="0" rIns="0" tIns="0" bIns="0" anchor="t">
+            <a:spAutoFit/>
+          </a:bodyPr>
+          <a:lstStyle/>
+          <a:p>
+            <a:pPr algn="l">
+              <a:lnSpc>
+                <a:spcPts val="899"/>
+              </a:lnSpc>
+            </a:pPr>
+            <a:r>
+              <a:rPr sz="620" b="0">
+                <a:solidFill>
+                  <a:srgbClr val="12151C"/>
+                </a:solidFill>
+                <a:latin typeface="맑은 고딕"/>
+                <a:ea typeface="맑은 고딕"/>
+              </a:rPr>
+              <a:t>www.example.com</a:t>
+            </a:r>
+          </a:p>
+        </p:txBody>
+      </p:sp>
+      <p:sp>
+        <p:nvSpPr>
+          <p:cNvPr id="17" name="Rectangle 16"/>
+          <p:cNvSpPr/>
+          <p:nvPr/>
+        </p:nvSpPr>
+        <p:spPr>
+          <a:xfrm>
+            <a:off x="2376000" y="1224000"/>
+            <a:ext cx="237600" cy="237600"/>
+          </a:xfrm>
+          <a:prstGeom prst="rect">
+            <a:avLst/>
+          </a:prstGeom>
+          <a:noFill/>
+          <a:ln w="4320">
             <a:solidFill>
               <a:srgbClr val="6B7280"/>
             </a:solidFill>
@@ -3644,14 +4204,14 @@
       </p:sp>
       <p:sp>
         <p:nvSpPr>
-          <p:cNvPr id="3" name="텍스트"/>
+          <p:cNvPr id="18" name="텍스트"/>
           <p:cNvSpPr txBox="1"/>
           <p:nvPr/>
         </p:nvSpPr>
         <p:spPr>
           <a:xfrm>
-            <a:off x="2304000" y="504000"/>
-            <a:ext cx="684000" cy="684000"/>
+            <a:off x="2376000" y="1224000"/>
+            <a:ext cx="237600" cy="237600"/>
           </a:xfrm>
           <a:prstGeom prst="rect">
             <a:avLst/>
@@ -3666,11 +4226,11 @@
           <a:p>
             <a:pPr algn="ctr">
               <a:lnSpc>
-                <a:spcPts val="1595"/>
+                <a:spcPts val="725"/>
               </a:lnSpc>
             </a:pPr>
             <a:r>
-              <a:rPr sz="1100" b="1">
+              <a:rPr sz="500" b="1">
                 <a:solidFill>
                   <a:srgbClr val="6B7280"/>
                 </a:solidFill>
@@ -3678,132 +4238,6 @@
                 <a:ea typeface="맑은 고딕"/>
               </a:rPr>
               <a:t>QR</a:t>
-            </a:r>
-          </a:p>
-        </p:txBody>
-      </p:sp>
-      <p:sp>
-        <p:nvSpPr>
-          <p:cNvPr id="4" name="텍스트"/>
-          <p:cNvSpPr txBox="1"/>
-          <p:nvPr/>
-        </p:nvSpPr>
-        <p:spPr>
-          <a:xfrm>
-            <a:off x="252000" y="504000"/>
-            <a:ext cx="1728000" cy="720000"/>
-          </a:xfrm>
-          <a:prstGeom prst="rect">
-            <a:avLst/>
-          </a:prstGeom>
-          <a:noFill/>
-        </p:spPr>
-        <p:txBody>
-          <a:bodyPr wrap="square" lIns="0" rIns="0" tIns="0" bIns="0" anchor="t">
-            <a:spAutoFit/>
-          </a:bodyPr>
-          <a:lstStyle/>
-          <a:p>
-            <a:pPr algn="l">
-              <a:lnSpc>
-                <a:spcPts val="1739"/>
-              </a:lnSpc>
-            </a:pPr>
-            <a:r>
-              <a:rPr sz="1200" b="1">
-                <a:solidFill>
-                  <a:srgbClr val="12151C"/>
-                </a:solidFill>
-                <a:latin typeface="맑은 고딕"/>
-                <a:ea typeface="맑은 고딕"/>
-              </a:rPr>
-              <a:t>혼자여도 팀처럼</a:t>
-            </a:r>
-          </a:p>
-          <a:p>
-            <a:pPr algn="l">
-              <a:lnSpc>
-                <a:spcPts val="1739"/>
-              </a:lnSpc>
-            </a:pPr>
-            <a:r>
-              <a:rPr sz="1200" b="1">
-                <a:solidFill>
-                  <a:srgbClr val="12151C"/>
-                </a:solidFill>
-                <a:latin typeface="맑은 고딕"/>
-                <a:ea typeface="맑은 고딕"/>
-              </a:rPr>
-              <a:t>일합니다</a:t>
-            </a:r>
-          </a:p>
-        </p:txBody>
-      </p:sp>
-      <p:sp>
-        <p:nvSpPr>
-          <p:cNvPr id="5" name="Rectangle 4"/>
-          <p:cNvSpPr/>
-          <p:nvPr/>
-        </p:nvSpPr>
-        <p:spPr>
-          <a:xfrm>
-            <a:off x="252000" y="1296000"/>
-            <a:ext cx="144000" cy="18000"/>
-          </a:xfrm>
-          <a:prstGeom prst="rect">
-            <a:avLst/>
-          </a:prstGeom>
-          <a:solidFill>
-            <a:srgbClr val="FF9E6B"/>
-          </a:solidFill>
-          <a:ln>
-            <a:noFill/>
-          </a:ln>
-        </p:spPr>
-        <p:txBody>
-          <a:bodyPr rtlCol="0" anchor="ctr"/>
-          <a:lstStyle/>
-          <a:p>
-            <a:pPr algn="ctr"/>
-          </a:p>
-        </p:txBody>
-      </p:sp>
-      <p:sp>
-        <p:nvSpPr>
-          <p:cNvPr id="6" name="텍스트"/>
-          <p:cNvSpPr txBox="1"/>
-          <p:nvPr/>
-        </p:nvSpPr>
-        <p:spPr>
-          <a:xfrm>
-            <a:off x="252000" y="1404000"/>
-            <a:ext cx="1656000" cy="133351"/>
-          </a:xfrm>
-          <a:prstGeom prst="rect">
-            <a:avLst/>
-          </a:prstGeom>
-          <a:noFill/>
-        </p:spPr>
-        <p:txBody>
-          <a:bodyPr wrap="square" lIns="0" rIns="0" tIns="0" bIns="0" anchor="t">
-            <a:spAutoFit/>
-          </a:bodyPr>
-          <a:lstStyle/>
-          <a:p>
-            <a:pPr algn="l">
-              <a:lnSpc>
-                <a:spcPts val="1015"/>
-              </a:lnSpc>
-            </a:pPr>
-            <a:r>
-              <a:rPr sz="700" b="1" spc="200">
-                <a:solidFill>
-                  <a:srgbClr val="6B7280"/>
-                </a:solidFill>
-                <a:latin typeface="맑은 고딕"/>
-                <a:ea typeface="맑은 고딕"/>
-              </a:rPr>
-              <a:t>소속 · 브랜드</a:t>
             </a:r>
           </a:p>
         </p:txBody>
